--- a/문제해결프로그래밍_숙제/제출용/숙제7_2022182035.pptx
+++ b/문제해결프로그래밍_숙제/제출용/숙제7_2022182035.pptx
@@ -34172,20 +34172,140 @@
           </a:bodyPr>
           <a:lstStyle/>
           <a:p>
-            <a:pPr marL="457200" lvl="0" indent="-406400" algn="ctr" rtl="0">
-              <a:spcBef>
-                <a:spcPts val="0"/>
-              </a:spcBef>
-              <a:spcAft>
-                <a:spcPts val="0"/>
-              </a:spcAft>
-              <a:buSzPts val="2800"/>
+            <a:pPr marL="457200" lvl="0" indent="-406400">
               <a:buAutoNum type="arabicPeriod"/>
             </a:pPr>
+            <a:r>
+              <a:rPr lang="ko-KR" altLang="en-US" dirty="0"/>
+              <a:t>택배 배송 </a:t>
+            </a:r>
+            <a:r>
+              <a:rPr lang="en-US" altLang="ko-KR" dirty="0"/>
+              <a:t>(</a:t>
+            </a:r>
+            <a:r>
+              <a:rPr lang="en-US" altLang="ko-KR" dirty="0" err="1"/>
+              <a:t>TUKorea</a:t>
+            </a:r>
+            <a:r>
+              <a:rPr lang="en-US" altLang="ko-KR" dirty="0"/>
+              <a:t>, </a:t>
+            </a:r>
+            <a:r>
+              <a:rPr lang="ko-KR" altLang="en-US" dirty="0"/>
+              <a:t>백준</a:t>
+            </a:r>
+            <a:r>
+              <a:rPr lang="en-US" altLang="ko-KR" dirty="0"/>
+              <a:t>, </a:t>
+            </a:r>
+            <a:r>
+              <a:rPr lang="ko-KR" altLang="en-US" dirty="0" err="1"/>
+              <a:t>다익스트라</a:t>
+            </a:r>
+            <a:r>
+              <a:rPr lang="en-US" altLang="ko-KR" dirty="0"/>
+              <a:t>)</a:t>
+            </a:r>
+            <a:br>
+              <a:rPr lang="en-US" altLang="ko-KR" dirty="0"/>
+            </a:br>
             <a:endParaRPr dirty="0"/>
           </a:p>
         </p:txBody>
       </p:sp>
+      <p:pic>
+        <p:nvPicPr>
+          <p:cNvPr id="3" name="그림 2">
+            <a:extLst>
+              <a:ext uri="{FF2B5EF4-FFF2-40B4-BE49-F238E27FC236}">
+                <a16:creationId xmlns:a16="http://schemas.microsoft.com/office/drawing/2014/main" id="{4CFD9973-325C-CB48-3776-3C362B7EAAF1}"/>
+              </a:ext>
+            </a:extLst>
+          </p:cNvPr>
+          <p:cNvPicPr>
+            <a:picLocks noChangeAspect="1"/>
+          </p:cNvPicPr>
+          <p:nvPr/>
+        </p:nvPicPr>
+        <p:blipFill>
+          <a:blip r:embed="rId3"/>
+          <a:stretch>
+            <a:fillRect/>
+          </a:stretch>
+        </p:blipFill>
+        <p:spPr>
+          <a:xfrm>
+            <a:off x="4571988" y="1816596"/>
+            <a:ext cx="4227238" cy="1770053"/>
+          </a:xfrm>
+          <a:prstGeom prst="rect">
+            <a:avLst/>
+          </a:prstGeom>
+        </p:spPr>
+      </p:pic>
+      <p:pic>
+        <p:nvPicPr>
+          <p:cNvPr id="5" name="그림 4">
+            <a:extLst>
+              <a:ext uri="{FF2B5EF4-FFF2-40B4-BE49-F238E27FC236}">
+                <a16:creationId xmlns:a16="http://schemas.microsoft.com/office/drawing/2014/main" id="{B1BD0545-60F9-113E-5286-D1E3FF22D743}"/>
+              </a:ext>
+            </a:extLst>
+          </p:cNvPr>
+          <p:cNvPicPr>
+            <a:picLocks noChangeAspect="1"/>
+          </p:cNvPicPr>
+          <p:nvPr/>
+        </p:nvPicPr>
+        <p:blipFill>
+          <a:blip r:embed="rId4"/>
+          <a:srcRect b="33333"/>
+          <a:stretch>
+            <a:fillRect/>
+          </a:stretch>
+        </p:blipFill>
+        <p:spPr>
+          <a:xfrm>
+            <a:off x="227168" y="987124"/>
+            <a:ext cx="2127297" cy="3429000"/>
+          </a:xfrm>
+          <a:prstGeom prst="rect">
+            <a:avLst/>
+          </a:prstGeom>
+        </p:spPr>
+      </p:pic>
+      <p:pic>
+        <p:nvPicPr>
+          <p:cNvPr id="7" name="그림 6">
+            <a:extLst>
+              <a:ext uri="{FF2B5EF4-FFF2-40B4-BE49-F238E27FC236}">
+                <a16:creationId xmlns:a16="http://schemas.microsoft.com/office/drawing/2014/main" id="{AB176C00-4740-5C01-7F31-0E492C6FCAB7}"/>
+              </a:ext>
+            </a:extLst>
+          </p:cNvPr>
+          <p:cNvPicPr>
+            <a:picLocks noChangeAspect="1"/>
+          </p:cNvPicPr>
+          <p:nvPr/>
+        </p:nvPicPr>
+        <p:blipFill>
+          <a:blip r:embed="rId4"/>
+          <a:srcRect t="66508"/>
+          <a:stretch>
+            <a:fillRect/>
+          </a:stretch>
+        </p:blipFill>
+        <p:spPr>
+          <a:xfrm>
+            <a:off x="2354465" y="1840291"/>
+            <a:ext cx="2127297" cy="1722664"/>
+          </a:xfrm>
+          <a:prstGeom prst="rect">
+            <a:avLst/>
+          </a:prstGeom>
+        </p:spPr>
+      </p:pic>
     </p:spTree>
   </p:cSld>
   <p:clrMapOvr>
@@ -34248,23 +34368,96 @@
           </a:bodyPr>
           <a:lstStyle/>
           <a:p>
-            <a:pPr marL="50800" lvl="0" algn="ctr" rtl="0">
-              <a:spcBef>
-                <a:spcPts val="0"/>
-              </a:spcBef>
-              <a:spcAft>
-                <a:spcPts val="0"/>
-              </a:spcAft>
-              <a:buSzPts val="2800"/>
-            </a:pPr>
+            <a:pPr marL="50800" lvl="0"/>
             <a:r>
               <a:rPr lang="en-US" dirty="0"/>
               <a:t>2. </a:t>
             </a:r>
+            <a:r>
+              <a:rPr lang="ko-KR" altLang="en-US" dirty="0"/>
+              <a:t>순회강연 </a:t>
+            </a:r>
+            <a:r>
+              <a:rPr lang="en-US" altLang="ko-KR" dirty="0"/>
+              <a:t>(</a:t>
+            </a:r>
+            <a:r>
+              <a:rPr lang="en-US" altLang="ko-KR" dirty="0" err="1"/>
+              <a:t>TUKorea</a:t>
+            </a:r>
+            <a:r>
+              <a:rPr lang="en-US" altLang="ko-KR" dirty="0"/>
+              <a:t>,</a:t>
+            </a:r>
+            <a:r>
+              <a:rPr lang="ko-KR" altLang="en-US" dirty="0"/>
+              <a:t>백준</a:t>
+            </a:r>
+            <a:r>
+              <a:rPr lang="en-US" altLang="ko-KR" dirty="0"/>
+              <a:t>, </a:t>
+            </a:r>
+            <a:r>
+              <a:rPr lang="ko-KR" altLang="en-US" dirty="0"/>
+              <a:t>정렬</a:t>
+            </a:r>
+            <a:r>
+              <a:rPr lang="en-US" altLang="ko-KR" dirty="0"/>
+              <a:t>, </a:t>
+            </a:r>
+            <a:r>
+              <a:rPr lang="ko-KR" altLang="en-US" dirty="0" err="1"/>
+              <a:t>우선순위큐</a:t>
+            </a:r>
+            <a:r>
+              <a:rPr lang="en-US" altLang="ko-KR" dirty="0"/>
+              <a:t>, </a:t>
+            </a:r>
+            <a:r>
+              <a:rPr lang="ko-KR" altLang="en-US" dirty="0" err="1"/>
+              <a:t>그리디</a:t>
+            </a:r>
+            <a:r>
+              <a:rPr lang="en-US" altLang="ko-KR" dirty="0"/>
+              <a:t>)</a:t>
+            </a:r>
+            <a:br>
+              <a:rPr lang="en-US" altLang="ko-KR" dirty="0"/>
+            </a:br>
             <a:endParaRPr dirty="0"/>
           </a:p>
         </p:txBody>
       </p:sp>
+      <p:pic>
+        <p:nvPicPr>
+          <p:cNvPr id="3" name="그림 2">
+            <a:extLst>
+              <a:ext uri="{FF2B5EF4-FFF2-40B4-BE49-F238E27FC236}">
+                <a16:creationId xmlns:a16="http://schemas.microsoft.com/office/drawing/2014/main" id="{323AF8B3-142B-F0F2-82C2-14C4C98DD87D}"/>
+              </a:ext>
+            </a:extLst>
+          </p:cNvPr>
+          <p:cNvPicPr>
+            <a:picLocks noChangeAspect="1"/>
+          </p:cNvPicPr>
+          <p:nvPr/>
+        </p:nvPicPr>
+        <p:blipFill>
+          <a:blip r:embed="rId3"/>
+          <a:stretch>
+            <a:fillRect/>
+          </a:stretch>
+        </p:blipFill>
+        <p:spPr>
+          <a:xfrm>
+            <a:off x="1285863" y="1519947"/>
+            <a:ext cx="6572250" cy="3037668"/>
+          </a:xfrm>
+          <a:prstGeom prst="rect">
+            <a:avLst/>
+          </a:prstGeom>
+        </p:spPr>
+      </p:pic>
     </p:spTree>
     <p:extLst>
       <p:ext uri="{BB962C8B-B14F-4D97-AF65-F5344CB8AC3E}">
@@ -34332,23 +34525,127 @@
           </a:bodyPr>
           <a:lstStyle/>
           <a:p>
-            <a:pPr marL="50800" lvl="0" algn="ctr" rtl="0">
-              <a:spcBef>
-                <a:spcPts val="0"/>
-              </a:spcBef>
-              <a:spcAft>
-                <a:spcPts val="0"/>
-              </a:spcAft>
-              <a:buSzPts val="2800"/>
-            </a:pPr>
+            <a:pPr marL="50800" lvl="0"/>
             <a:r>
               <a:rPr lang="en-US" dirty="0"/>
               <a:t>3. </a:t>
+            </a:r>
+            <a:r>
+              <a:rPr lang="ko-KR" altLang="en-US" dirty="0" err="1"/>
+              <a:t>소가길을건너간이유</a:t>
+            </a:r>
+            <a:r>
+              <a:rPr lang="en-US" altLang="ko-KR" dirty="0"/>
+              <a:t>4 (</a:t>
+            </a:r>
+            <a:r>
+              <a:rPr lang="en-US" altLang="ko-KR" dirty="0" err="1"/>
+              <a:t>TUKorea</a:t>
+            </a:r>
+            <a:r>
+              <a:rPr lang="en-US" altLang="ko-KR" dirty="0"/>
+              <a:t>,</a:t>
+            </a:r>
+            <a:r>
+              <a:rPr lang="ko-KR" altLang="en-US" dirty="0"/>
+              <a:t>백준</a:t>
+            </a:r>
+            <a:r>
+              <a:rPr lang="en-US" altLang="ko-KR" dirty="0"/>
+              <a:t>,</a:t>
+            </a:r>
+            <a:r>
+              <a:rPr lang="ko-KR" altLang="en-US" dirty="0" err="1"/>
+              <a:t>우선순위큐</a:t>
+            </a:r>
+            <a:r>
+              <a:rPr lang="en-US" altLang="ko-KR" dirty="0"/>
+              <a:t>,</a:t>
+            </a:r>
+            <a:r>
+              <a:rPr lang="ko-KR" altLang="en-US" dirty="0" err="1"/>
+              <a:t>최소힙</a:t>
+            </a:r>
+            <a:r>
+              <a:rPr lang="en-US" altLang="ko-KR" dirty="0"/>
+              <a:t>,</a:t>
+            </a:r>
+            <a:r>
+              <a:rPr lang="ko-KR" altLang="en-US" dirty="0" err="1"/>
+              <a:t>그리디</a:t>
+            </a:r>
+            <a:r>
+              <a:rPr lang="en-US" altLang="ko-KR" dirty="0"/>
+              <a:t>)</a:t>
+            </a:r>
+            <a:r>
+              <a:rPr lang="en-US" dirty="0"/>
+              <a:t> </a:t>
             </a:r>
             <a:endParaRPr dirty="0"/>
           </a:p>
         </p:txBody>
       </p:sp>
+      <p:pic>
+        <p:nvPicPr>
+          <p:cNvPr id="3" name="그림 2">
+            <a:extLst>
+              <a:ext uri="{FF2B5EF4-FFF2-40B4-BE49-F238E27FC236}">
+                <a16:creationId xmlns:a16="http://schemas.microsoft.com/office/drawing/2014/main" id="{47C596C2-1756-0353-B880-E3C19BBD98B6}"/>
+              </a:ext>
+            </a:extLst>
+          </p:cNvPr>
+          <p:cNvPicPr>
+            <a:picLocks noChangeAspect="1"/>
+          </p:cNvPicPr>
+          <p:nvPr/>
+        </p:nvPicPr>
+        <p:blipFill>
+          <a:blip r:embed="rId3"/>
+          <a:stretch>
+            <a:fillRect/>
+          </a:stretch>
+        </p:blipFill>
+        <p:spPr>
+          <a:xfrm>
+            <a:off x="3494315" y="2106950"/>
+            <a:ext cx="4927273" cy="2053828"/>
+          </a:xfrm>
+          <a:prstGeom prst="rect">
+            <a:avLst/>
+          </a:prstGeom>
+        </p:spPr>
+      </p:pic>
+      <p:pic>
+        <p:nvPicPr>
+          <p:cNvPr id="5" name="그림 4">
+            <a:extLst>
+              <a:ext uri="{FF2B5EF4-FFF2-40B4-BE49-F238E27FC236}">
+                <a16:creationId xmlns:a16="http://schemas.microsoft.com/office/drawing/2014/main" id="{435F005C-5FBB-E2C5-883F-1C45CEE5CCB1}"/>
+              </a:ext>
+            </a:extLst>
+          </p:cNvPr>
+          <p:cNvPicPr>
+            <a:picLocks noChangeAspect="1"/>
+          </p:cNvPicPr>
+          <p:nvPr/>
+        </p:nvPicPr>
+        <p:blipFill>
+          <a:blip r:embed="rId4"/>
+          <a:stretch>
+            <a:fillRect/>
+          </a:stretch>
+        </p:blipFill>
+        <p:spPr>
+          <a:xfrm>
+            <a:off x="1423592" y="1370379"/>
+            <a:ext cx="1518633" cy="3526971"/>
+          </a:xfrm>
+          <a:prstGeom prst="rect">
+            <a:avLst/>
+          </a:prstGeom>
+        </p:spPr>
+      </p:pic>
     </p:spTree>
     <p:extLst>
       <p:ext uri="{BB962C8B-B14F-4D97-AF65-F5344CB8AC3E}">
@@ -34416,23 +34713,99 @@
           </a:bodyPr>
           <a:lstStyle/>
           <a:p>
-            <a:pPr marL="50800" lvl="0" algn="ctr" rtl="0">
-              <a:spcBef>
-                <a:spcPts val="0"/>
-              </a:spcBef>
-              <a:spcAft>
-                <a:spcPts val="0"/>
-              </a:spcAft>
-              <a:buSzPts val="2800"/>
-            </a:pPr>
+            <a:pPr marL="50800" lvl="0"/>
             <a:r>
               <a:rPr lang="en-US" dirty="0"/>
               <a:t>4. </a:t>
+            </a:r>
+            <a:r>
+              <a:rPr lang="ko-KR" altLang="en-US" dirty="0"/>
+              <a:t>다음 순열 </a:t>
+            </a:r>
+            <a:r>
+              <a:rPr lang="en-US" altLang="ko-KR" dirty="0"/>
+              <a:t>(</a:t>
+            </a:r>
+            <a:r>
+              <a:rPr lang="en-US" altLang="ko-KR" dirty="0" err="1"/>
+              <a:t>TUKorea</a:t>
+            </a:r>
+            <a:r>
+              <a:rPr lang="en-US" altLang="ko-KR" dirty="0"/>
+              <a:t>, </a:t>
+            </a:r>
+            <a:r>
+              <a:rPr lang="ko-KR" altLang="en-US" dirty="0"/>
+              <a:t>구현</a:t>
+            </a:r>
+            <a:r>
+              <a:rPr lang="en-US" altLang="ko-KR" dirty="0"/>
+              <a:t>) </a:t>
             </a:r>
             <a:endParaRPr dirty="0"/>
           </a:p>
         </p:txBody>
       </p:sp>
+      <p:pic>
+        <p:nvPicPr>
+          <p:cNvPr id="3" name="그림 2">
+            <a:extLst>
+              <a:ext uri="{FF2B5EF4-FFF2-40B4-BE49-F238E27FC236}">
+                <a16:creationId xmlns:a16="http://schemas.microsoft.com/office/drawing/2014/main" id="{B96AC808-7996-7E84-EE34-4334D635ED1E}"/>
+              </a:ext>
+            </a:extLst>
+          </p:cNvPr>
+          <p:cNvPicPr>
+            <a:picLocks noChangeAspect="1"/>
+          </p:cNvPicPr>
+          <p:nvPr/>
+        </p:nvPicPr>
+        <p:blipFill>
+          <a:blip r:embed="rId3"/>
+          <a:stretch>
+            <a:fillRect/>
+          </a:stretch>
+        </p:blipFill>
+        <p:spPr>
+          <a:xfrm>
+            <a:off x="3126922" y="1827502"/>
+            <a:ext cx="5568043" cy="1741594"/>
+          </a:xfrm>
+          <a:prstGeom prst="rect">
+            <a:avLst/>
+          </a:prstGeom>
+        </p:spPr>
+      </p:pic>
+      <p:pic>
+        <p:nvPicPr>
+          <p:cNvPr id="5" name="그림 4">
+            <a:extLst>
+              <a:ext uri="{FF2B5EF4-FFF2-40B4-BE49-F238E27FC236}">
+                <a16:creationId xmlns:a16="http://schemas.microsoft.com/office/drawing/2014/main" id="{97AD4C26-6E22-3A57-FA4D-7BF22A0D196F}"/>
+              </a:ext>
+            </a:extLst>
+          </p:cNvPr>
+          <p:cNvPicPr>
+            <a:picLocks noChangeAspect="1"/>
+          </p:cNvPicPr>
+          <p:nvPr/>
+        </p:nvPicPr>
+        <p:blipFill>
+          <a:blip r:embed="rId4"/>
+          <a:stretch>
+            <a:fillRect/>
+          </a:stretch>
+        </p:blipFill>
+        <p:spPr>
+          <a:xfrm>
+            <a:off x="822500" y="983799"/>
+            <a:ext cx="2027533" cy="3429000"/>
+          </a:xfrm>
+          <a:prstGeom prst="rect">
+            <a:avLst/>
+          </a:prstGeom>
+        </p:spPr>
+      </p:pic>
     </p:spTree>
     <p:extLst>
       <p:ext uri="{BB962C8B-B14F-4D97-AF65-F5344CB8AC3E}">
@@ -34500,23 +34873,129 @@
           </a:bodyPr>
           <a:lstStyle/>
           <a:p>
-            <a:pPr marL="50800" lvl="0" algn="ctr" rtl="0">
-              <a:spcBef>
-                <a:spcPts val="0"/>
-              </a:spcBef>
-              <a:spcAft>
-                <a:spcPts val="0"/>
-              </a:spcAft>
-              <a:buSzPts val="2800"/>
-            </a:pPr>
+            <a:pPr marL="50800" lvl="0"/>
             <a:r>
               <a:rPr lang="en-US" dirty="0"/>
               <a:t>5. </a:t>
+            </a:r>
+            <a:r>
+              <a:rPr lang="ko-KR" altLang="en-US" dirty="0"/>
+              <a:t>합승 택시</a:t>
+            </a:r>
+            <a:r>
+              <a:rPr lang="en-US" altLang="ko-KR" dirty="0"/>
+              <a:t>(Programmers, Floyd </a:t>
+            </a:r>
+            <a:r>
+              <a:rPr lang="en-US" altLang="ko-KR" dirty="0" err="1"/>
+              <a:t>Warshall</a:t>
+            </a:r>
+            <a:r>
+              <a:rPr lang="en-US" altLang="ko-KR" dirty="0"/>
+              <a:t>, </a:t>
+            </a:r>
+            <a:r>
+              <a:rPr lang="ko-KR" altLang="en-US" dirty="0" err="1"/>
+              <a:t>우선순위큐</a:t>
+            </a:r>
+            <a:r>
+              <a:rPr lang="en-US" altLang="ko-KR" dirty="0"/>
+              <a:t>) </a:t>
             </a:r>
             <a:endParaRPr dirty="0"/>
           </a:p>
         </p:txBody>
       </p:sp>
+      <p:pic>
+        <p:nvPicPr>
+          <p:cNvPr id="3" name="그림 2">
+            <a:extLst>
+              <a:ext uri="{FF2B5EF4-FFF2-40B4-BE49-F238E27FC236}">
+                <a16:creationId xmlns:a16="http://schemas.microsoft.com/office/drawing/2014/main" id="{19BCBA01-11B8-AD53-846E-9AAEF4906A78}"/>
+              </a:ext>
+            </a:extLst>
+          </p:cNvPr>
+          <p:cNvPicPr>
+            <a:picLocks noChangeAspect="1"/>
+          </p:cNvPicPr>
+          <p:nvPr/>
+        </p:nvPicPr>
+        <p:blipFill>
+          <a:blip r:embed="rId3"/>
+          <a:stretch>
+            <a:fillRect/>
+          </a:stretch>
+        </p:blipFill>
+        <p:spPr>
+          <a:xfrm>
+            <a:off x="5697731" y="1150822"/>
+            <a:ext cx="2654270" cy="3502822"/>
+          </a:xfrm>
+          <a:prstGeom prst="rect">
+            <a:avLst/>
+          </a:prstGeom>
+        </p:spPr>
+      </p:pic>
+      <p:pic>
+        <p:nvPicPr>
+          <p:cNvPr id="5" name="그림 4">
+            <a:extLst>
+              <a:ext uri="{FF2B5EF4-FFF2-40B4-BE49-F238E27FC236}">
+                <a16:creationId xmlns:a16="http://schemas.microsoft.com/office/drawing/2014/main" id="{4530AF5D-84EC-0D5C-663C-48B6B4EF7B4D}"/>
+              </a:ext>
+            </a:extLst>
+          </p:cNvPr>
+          <p:cNvPicPr>
+            <a:picLocks noChangeAspect="1"/>
+          </p:cNvPicPr>
+          <p:nvPr/>
+        </p:nvPicPr>
+        <p:blipFill>
+          <a:blip r:embed="rId4"/>
+          <a:stretch>
+            <a:fillRect/>
+          </a:stretch>
+        </p:blipFill>
+        <p:spPr>
+          <a:xfrm>
+            <a:off x="969098" y="1319021"/>
+            <a:ext cx="1657225" cy="3148173"/>
+          </a:xfrm>
+          <a:prstGeom prst="rect">
+            <a:avLst/>
+          </a:prstGeom>
+        </p:spPr>
+      </p:pic>
+      <p:pic>
+        <p:nvPicPr>
+          <p:cNvPr id="7" name="그림 6">
+            <a:extLst>
+              <a:ext uri="{FF2B5EF4-FFF2-40B4-BE49-F238E27FC236}">
+                <a16:creationId xmlns:a16="http://schemas.microsoft.com/office/drawing/2014/main" id="{E6FB8015-9255-DA93-4BBC-81E0B91D343C}"/>
+              </a:ext>
+            </a:extLst>
+          </p:cNvPr>
+          <p:cNvPicPr>
+            <a:picLocks noChangeAspect="1"/>
+          </p:cNvPicPr>
+          <p:nvPr/>
+        </p:nvPicPr>
+        <p:blipFill>
+          <a:blip r:embed="rId5"/>
+          <a:stretch>
+            <a:fillRect/>
+          </a:stretch>
+        </p:blipFill>
+        <p:spPr>
+          <a:xfrm>
+            <a:off x="2943950" y="1398867"/>
+            <a:ext cx="2436154" cy="2771286"/>
+          </a:xfrm>
+          <a:prstGeom prst="rect">
+            <a:avLst/>
+          </a:prstGeom>
+        </p:spPr>
+      </p:pic>
     </p:spTree>
     <p:extLst>
       <p:ext uri="{BB962C8B-B14F-4D97-AF65-F5344CB8AC3E}">
@@ -34584,23 +35063,142 @@
           </a:bodyPr>
           <a:lstStyle/>
           <a:p>
-            <a:pPr marL="50800" lvl="0" algn="ctr" rtl="0">
-              <a:spcBef>
-                <a:spcPts val="0"/>
-              </a:spcBef>
-              <a:spcAft>
-                <a:spcPts val="0"/>
-              </a:spcAft>
-              <a:buSzPts val="2800"/>
-            </a:pPr>
+            <a:pPr marL="50800" lvl="0"/>
             <a:r>
               <a:rPr lang="en-US" dirty="0"/>
               <a:t>6. </a:t>
+            </a:r>
+            <a:r>
+              <a:rPr lang="ko-KR" altLang="en-US" dirty="0"/>
+              <a:t>파티 </a:t>
+            </a:r>
+            <a:r>
+              <a:rPr lang="en-US" altLang="ko-KR" dirty="0"/>
+              <a:t>(</a:t>
+            </a:r>
+            <a:r>
+              <a:rPr lang="en-US" altLang="ko-KR" dirty="0" err="1"/>
+              <a:t>TUKorea</a:t>
+            </a:r>
+            <a:r>
+              <a:rPr lang="en-US" altLang="ko-KR" dirty="0"/>
+              <a:t>, </a:t>
+            </a:r>
+            <a:r>
+              <a:rPr lang="ko-KR" altLang="en-US" dirty="0"/>
+              <a:t>백준</a:t>
+            </a:r>
+            <a:r>
+              <a:rPr lang="en-US" altLang="ko-KR" dirty="0"/>
+              <a:t>, </a:t>
+            </a:r>
+            <a:r>
+              <a:rPr lang="ko-KR" altLang="en-US" dirty="0" err="1"/>
+              <a:t>다익스트라</a:t>
+            </a:r>
+            <a:r>
+              <a:rPr lang="en-US" altLang="ko-KR" dirty="0"/>
+              <a:t>)</a:t>
+            </a:r>
+            <a:r>
+              <a:rPr lang="en-US" dirty="0"/>
+              <a:t> </a:t>
             </a:r>
             <a:endParaRPr dirty="0"/>
           </a:p>
         </p:txBody>
       </p:sp>
+      <p:pic>
+        <p:nvPicPr>
+          <p:cNvPr id="3" name="그림 2">
+            <a:extLst>
+              <a:ext uri="{FF2B5EF4-FFF2-40B4-BE49-F238E27FC236}">
+                <a16:creationId xmlns:a16="http://schemas.microsoft.com/office/drawing/2014/main" id="{F3172FFA-CDE6-BC95-C709-11D88A12E51A}"/>
+              </a:ext>
+            </a:extLst>
+          </p:cNvPr>
+          <p:cNvPicPr>
+            <a:picLocks noChangeAspect="1"/>
+          </p:cNvPicPr>
+          <p:nvPr/>
+        </p:nvPicPr>
+        <p:blipFill>
+          <a:blip r:embed="rId3"/>
+          <a:stretch>
+            <a:fillRect/>
+          </a:stretch>
+        </p:blipFill>
+        <p:spPr>
+          <a:xfrm>
+            <a:off x="4054644" y="1810375"/>
+            <a:ext cx="4800597" cy="1993284"/>
+          </a:xfrm>
+          <a:prstGeom prst="rect">
+            <a:avLst/>
+          </a:prstGeom>
+        </p:spPr>
+      </p:pic>
+      <p:pic>
+        <p:nvPicPr>
+          <p:cNvPr id="5" name="그림 4">
+            <a:extLst>
+              <a:ext uri="{FF2B5EF4-FFF2-40B4-BE49-F238E27FC236}">
+                <a16:creationId xmlns:a16="http://schemas.microsoft.com/office/drawing/2014/main" id="{2598A606-AFC8-13F2-729B-DA6671DB6F5D}"/>
+              </a:ext>
+            </a:extLst>
+          </p:cNvPr>
+          <p:cNvPicPr>
+            <a:picLocks noChangeAspect="1"/>
+          </p:cNvPicPr>
+          <p:nvPr/>
+        </p:nvPicPr>
+        <p:blipFill>
+          <a:blip r:embed="rId4"/>
+          <a:stretch>
+            <a:fillRect/>
+          </a:stretch>
+        </p:blipFill>
+        <p:spPr>
+          <a:xfrm>
+            <a:off x="377399" y="1534502"/>
+            <a:ext cx="1796635" cy="2792951"/>
+          </a:xfrm>
+          <a:prstGeom prst="rect">
+            <a:avLst/>
+          </a:prstGeom>
+        </p:spPr>
+      </p:pic>
+      <p:pic>
+        <p:nvPicPr>
+          <p:cNvPr id="7" name="그림 6">
+            <a:extLst>
+              <a:ext uri="{FF2B5EF4-FFF2-40B4-BE49-F238E27FC236}">
+                <a16:creationId xmlns:a16="http://schemas.microsoft.com/office/drawing/2014/main" id="{7A9525AC-286B-EADF-BE4F-CD81F7B9D69B}"/>
+              </a:ext>
+            </a:extLst>
+          </p:cNvPr>
+          <p:cNvPicPr>
+            <a:picLocks noChangeAspect="1"/>
+          </p:cNvPicPr>
+          <p:nvPr/>
+        </p:nvPicPr>
+        <p:blipFill>
+          <a:blip r:embed="rId5"/>
+          <a:srcRect l="3733"/>
+          <a:stretch>
+            <a:fillRect/>
+          </a:stretch>
+        </p:blipFill>
+        <p:spPr>
+          <a:xfrm>
+            <a:off x="2216022" y="1261570"/>
+            <a:ext cx="1796634" cy="3090893"/>
+          </a:xfrm>
+          <a:prstGeom prst="rect">
+            <a:avLst/>
+          </a:prstGeom>
+        </p:spPr>
+      </p:pic>
     </p:spTree>
     <p:extLst>
       <p:ext uri="{BB962C8B-B14F-4D97-AF65-F5344CB8AC3E}">
@@ -34668,20 +35266,90 @@
           </a:bodyPr>
           <a:lstStyle/>
           <a:p>
-            <a:pPr marL="50800" lvl="0" algn="ctr" rtl="0">
-              <a:spcBef>
-                <a:spcPts val="0"/>
-              </a:spcBef>
-              <a:spcAft>
-                <a:spcPts val="0"/>
-              </a:spcAft>
-              <a:buSzPts val="2800"/>
-            </a:pPr>
+            <a:pPr marL="50800" lvl="0"/>
             <a:r>
               <a:rPr lang="en-US" dirty="0"/>
               <a:t>7. </a:t>
             </a:r>
+            <a:r>
+              <a:rPr lang="ko-KR" altLang="en-US" dirty="0"/>
+              <a:t>장애물</a:t>
+            </a:r>
+            <a:r>
+              <a:rPr lang="en-US" altLang="ko-KR" dirty="0"/>
+              <a:t>(TUKorea0073, Dijkstra)</a:t>
+            </a:r>
             <a:endParaRPr dirty="0"/>
+          </a:p>
+        </p:txBody>
+      </p:sp>
+      <p:pic>
+        <p:nvPicPr>
+          <p:cNvPr id="3" name="그림 2">
+            <a:extLst>
+              <a:ext uri="{FF2B5EF4-FFF2-40B4-BE49-F238E27FC236}">
+                <a16:creationId xmlns:a16="http://schemas.microsoft.com/office/drawing/2014/main" id="{503AD4BC-4DE6-BE0B-4726-17032B449FCB}"/>
+              </a:ext>
+            </a:extLst>
+          </p:cNvPr>
+          <p:cNvPicPr>
+            <a:picLocks noChangeAspect="1"/>
+          </p:cNvPicPr>
+          <p:nvPr/>
+        </p:nvPicPr>
+        <p:blipFill>
+          <a:blip r:embed="rId3"/>
+          <a:stretch>
+            <a:fillRect/>
+          </a:stretch>
+        </p:blipFill>
+        <p:spPr>
+          <a:xfrm>
+            <a:off x="547008" y="1440286"/>
+            <a:ext cx="4710303" cy="2747993"/>
+          </a:xfrm>
+          <a:prstGeom prst="rect">
+            <a:avLst/>
+          </a:prstGeom>
+        </p:spPr>
+      </p:pic>
+      <p:sp>
+        <p:nvSpPr>
+          <p:cNvPr id="4" name="TextBox 3">
+            <a:extLst>
+              <a:ext uri="{FF2B5EF4-FFF2-40B4-BE49-F238E27FC236}">
+                <a16:creationId xmlns:a16="http://schemas.microsoft.com/office/drawing/2014/main" id="{F6AD2F1E-766A-E8E5-4750-F6B8E4D84E71}"/>
+              </a:ext>
+            </a:extLst>
+          </p:cNvPr>
+          <p:cNvSpPr txBox="1"/>
+          <p:nvPr/>
+        </p:nvSpPr>
+        <p:spPr>
+          <a:xfrm>
+            <a:off x="6237514" y="2571750"/>
+            <a:ext cx="1861457" cy="307777"/>
+          </a:xfrm>
+          <a:prstGeom prst="rect">
+            <a:avLst/>
+          </a:prstGeom>
+          <a:noFill/>
+        </p:spPr>
+        <p:txBody>
+          <a:bodyPr wrap="square" rtlCol="0">
+            <a:spAutoFit/>
+          </a:bodyPr>
+          <a:lstStyle/>
+          <a:p>
+            <a:r>
+              <a:rPr lang="ko-KR" altLang="en-US" dirty="0"/>
+              <a:t>문제가 없습니다</a:t>
+            </a:r>
+            <a:r>
+              <a:rPr lang="en-US" altLang="ko-KR" dirty="0"/>
+              <a:t>.</a:t>
+            </a:r>
+            <a:endParaRPr lang="ko-KR" altLang="en-US" dirty="0"/>
           </a:p>
         </p:txBody>
       </p:sp>
